--- a/Представяне/Презентация.pptx
+++ b/Представяне/Презентация.pptx
@@ -7,14 +7,14 @@
   <p:sldIdLst>
     <p:sldId id="256" r:id="rId2"/>
   </p:sldIdLst>
-  <p:sldSz cx="12192000" cy="6858000"/>
+  <p:sldSz cx="9144000" cy="5143500" type="screen16x9"/>
   <p:notesSz cx="6858000" cy="9144000"/>
   <p:defaultTextStyle>
     <a:defPPr>
       <a:defRPr lang="bg-BG"/>
     </a:defPPr>
-    <a:lvl1pPr marL="0" algn="l" defTabSz="914400" rtl="0" eaLnBrk="1" latinLnBrk="0" hangingPunct="1">
-      <a:defRPr sz="1800" kern="1200">
+    <a:lvl1pPr marL="0" algn="l" defTabSz="685697" rtl="0" eaLnBrk="1" latinLnBrk="0" hangingPunct="1">
+      <a:defRPr sz="1400" kern="1200">
         <a:solidFill>
           <a:schemeClr val="tx1"/>
         </a:solidFill>
@@ -23,8 +23,8 @@
         <a:cs typeface="+mn-cs"/>
       </a:defRPr>
     </a:lvl1pPr>
-    <a:lvl2pPr marL="457200" algn="l" defTabSz="914400" rtl="0" eaLnBrk="1" latinLnBrk="0" hangingPunct="1">
-      <a:defRPr sz="1800" kern="1200">
+    <a:lvl2pPr marL="342848" algn="l" defTabSz="685697" rtl="0" eaLnBrk="1" latinLnBrk="0" hangingPunct="1">
+      <a:defRPr sz="1400" kern="1200">
         <a:solidFill>
           <a:schemeClr val="tx1"/>
         </a:solidFill>
@@ -33,8 +33,8 @@
         <a:cs typeface="+mn-cs"/>
       </a:defRPr>
     </a:lvl2pPr>
-    <a:lvl3pPr marL="914400" algn="l" defTabSz="914400" rtl="0" eaLnBrk="1" latinLnBrk="0" hangingPunct="1">
-      <a:defRPr sz="1800" kern="1200">
+    <a:lvl3pPr marL="685697" algn="l" defTabSz="685697" rtl="0" eaLnBrk="1" latinLnBrk="0" hangingPunct="1">
+      <a:defRPr sz="1400" kern="1200">
         <a:solidFill>
           <a:schemeClr val="tx1"/>
         </a:solidFill>
@@ -43,8 +43,8 @@
         <a:cs typeface="+mn-cs"/>
       </a:defRPr>
     </a:lvl3pPr>
-    <a:lvl4pPr marL="1371600" algn="l" defTabSz="914400" rtl="0" eaLnBrk="1" latinLnBrk="0" hangingPunct="1">
-      <a:defRPr sz="1800" kern="1200">
+    <a:lvl4pPr marL="1028546" algn="l" defTabSz="685697" rtl="0" eaLnBrk="1" latinLnBrk="0" hangingPunct="1">
+      <a:defRPr sz="1400" kern="1200">
         <a:solidFill>
           <a:schemeClr val="tx1"/>
         </a:solidFill>
@@ -53,8 +53,8 @@
         <a:cs typeface="+mn-cs"/>
       </a:defRPr>
     </a:lvl4pPr>
-    <a:lvl5pPr marL="1828800" algn="l" defTabSz="914400" rtl="0" eaLnBrk="1" latinLnBrk="0" hangingPunct="1">
-      <a:defRPr sz="1800" kern="1200">
+    <a:lvl5pPr marL="1371394" algn="l" defTabSz="685697" rtl="0" eaLnBrk="1" latinLnBrk="0" hangingPunct="1">
+      <a:defRPr sz="1400" kern="1200">
         <a:solidFill>
           <a:schemeClr val="tx1"/>
         </a:solidFill>
@@ -63,8 +63,8 @@
         <a:cs typeface="+mn-cs"/>
       </a:defRPr>
     </a:lvl5pPr>
-    <a:lvl6pPr marL="2286000" algn="l" defTabSz="914400" rtl="0" eaLnBrk="1" latinLnBrk="0" hangingPunct="1">
-      <a:defRPr sz="1800" kern="1200">
+    <a:lvl6pPr marL="1714243" algn="l" defTabSz="685697" rtl="0" eaLnBrk="1" latinLnBrk="0" hangingPunct="1">
+      <a:defRPr sz="1400" kern="1200">
         <a:solidFill>
           <a:schemeClr val="tx1"/>
         </a:solidFill>
@@ -73,8 +73,8 @@
         <a:cs typeface="+mn-cs"/>
       </a:defRPr>
     </a:lvl6pPr>
-    <a:lvl7pPr marL="2743200" algn="l" defTabSz="914400" rtl="0" eaLnBrk="1" latinLnBrk="0" hangingPunct="1">
-      <a:defRPr sz="1800" kern="1200">
+    <a:lvl7pPr marL="2057091" algn="l" defTabSz="685697" rtl="0" eaLnBrk="1" latinLnBrk="0" hangingPunct="1">
+      <a:defRPr sz="1400" kern="1200">
         <a:solidFill>
           <a:schemeClr val="tx1"/>
         </a:solidFill>
@@ -83,8 +83,8 @@
         <a:cs typeface="+mn-cs"/>
       </a:defRPr>
     </a:lvl7pPr>
-    <a:lvl8pPr marL="3200400" algn="l" defTabSz="914400" rtl="0" eaLnBrk="1" latinLnBrk="0" hangingPunct="1">
-      <a:defRPr sz="1800" kern="1200">
+    <a:lvl8pPr marL="2399940" algn="l" defTabSz="685697" rtl="0" eaLnBrk="1" latinLnBrk="0" hangingPunct="1">
+      <a:defRPr sz="1400" kern="1200">
         <a:solidFill>
           <a:schemeClr val="tx1"/>
         </a:solidFill>
@@ -93,8 +93,8 @@
         <a:cs typeface="+mn-cs"/>
       </a:defRPr>
     </a:lvl8pPr>
-    <a:lvl9pPr marL="3657600" algn="l" defTabSz="914400" rtl="0" eaLnBrk="1" latinLnBrk="0" hangingPunct="1">
-      <a:defRPr sz="1800" kern="1200">
+    <a:lvl9pPr marL="2742789" algn="l" defTabSz="685697" rtl="0" eaLnBrk="1" latinLnBrk="0" hangingPunct="1">
+      <a:defRPr sz="1400" kern="1200">
         <a:solidFill>
           <a:schemeClr val="tx1"/>
         </a:solidFill>
@@ -106,7 +106,7 @@
   </p:defaultTextStyle>
   <p:extLst>
     <p:ext uri="{EFAFB233-063F-42B5-8137-9DF3F51BA10A}">
-      <p15:sldGuideLst xmlns:p15="http://schemas.microsoft.com/office/powerpoint/2012/main">
+      <p15:sldGuideLst xmlns:p15="http://schemas.microsoft.com/office/powerpoint/2012/main" xmlns="">
         <p15:guide id="1" orient="horz" pos="2160" userDrawn="1">
           <p15:clr>
             <a:srgbClr val="A4A3A4"/>
@@ -152,15 +152,15 @@
         </p:nvSpPr>
         <p:spPr>
           <a:xfrm>
-            <a:off x="1524000" y="1122363"/>
-            <a:ext cx="9144000" cy="2387600"/>
+            <a:off x="1143000" y="841772"/>
+            <a:ext cx="6858000" cy="1790700"/>
           </a:xfrm>
         </p:spPr>
         <p:txBody>
           <a:bodyPr anchor="b"/>
           <a:lstStyle>
             <a:lvl1pPr algn="ctr">
-              <a:defRPr sz="6000"/>
+              <a:defRPr sz="4500"/>
             </a:lvl1pPr>
           </a:lstStyle>
           <a:p>
@@ -184,8 +184,8 @@
         </p:nvSpPr>
         <p:spPr>
           <a:xfrm>
-            <a:off x="1524000" y="3602038"/>
-            <a:ext cx="9144000" cy="1655762"/>
+            <a:off x="1143000" y="2701528"/>
+            <a:ext cx="6858000" cy="1241822"/>
           </a:xfrm>
         </p:spPr>
         <p:txBody>
@@ -193,39 +193,39 @@
           <a:lstStyle>
             <a:lvl1pPr marL="0" indent="0" algn="ctr">
               <a:buNone/>
-              <a:defRPr sz="2400"/>
+              <a:defRPr sz="1800"/>
             </a:lvl1pPr>
-            <a:lvl2pPr marL="457200" indent="0" algn="ctr">
-              <a:buNone/>
-              <a:defRPr sz="2000"/>
+            <a:lvl2pPr marL="342848" indent="0" algn="ctr">
+              <a:buNone/>
+              <a:defRPr sz="1500"/>
             </a:lvl2pPr>
-            <a:lvl3pPr marL="914400" indent="0" algn="ctr">
-              <a:buNone/>
-              <a:defRPr sz="1800"/>
+            <a:lvl3pPr marL="685697" indent="0" algn="ctr">
+              <a:buNone/>
+              <a:defRPr sz="1400"/>
             </a:lvl3pPr>
-            <a:lvl4pPr marL="1371600" indent="0" algn="ctr">
-              <a:buNone/>
-              <a:defRPr sz="1600"/>
+            <a:lvl4pPr marL="1028546" indent="0" algn="ctr">
+              <a:buNone/>
+              <a:defRPr sz="1200"/>
             </a:lvl4pPr>
-            <a:lvl5pPr marL="1828800" indent="0" algn="ctr">
-              <a:buNone/>
-              <a:defRPr sz="1600"/>
+            <a:lvl5pPr marL="1371394" indent="0" algn="ctr">
+              <a:buNone/>
+              <a:defRPr sz="1200"/>
             </a:lvl5pPr>
-            <a:lvl6pPr marL="2286000" indent="0" algn="ctr">
-              <a:buNone/>
-              <a:defRPr sz="1600"/>
+            <a:lvl6pPr marL="1714243" indent="0" algn="ctr">
+              <a:buNone/>
+              <a:defRPr sz="1200"/>
             </a:lvl6pPr>
-            <a:lvl7pPr marL="2743200" indent="0" algn="ctr">
-              <a:buNone/>
-              <a:defRPr sz="1600"/>
+            <a:lvl7pPr marL="2057091" indent="0" algn="ctr">
+              <a:buNone/>
+              <a:defRPr sz="1200"/>
             </a:lvl7pPr>
-            <a:lvl8pPr marL="3200400" indent="0" algn="ctr">
-              <a:buNone/>
-              <a:defRPr sz="1600"/>
+            <a:lvl8pPr marL="2399940" indent="0" algn="ctr">
+              <a:buNone/>
+              <a:defRPr sz="1200"/>
             </a:lvl8pPr>
-            <a:lvl9pPr marL="3657600" indent="0" algn="ctr">
-              <a:buNone/>
-              <a:defRPr sz="1600"/>
+            <a:lvl9pPr marL="2742789" indent="0" algn="ctr">
+              <a:buNone/>
+              <a:defRPr sz="1200"/>
             </a:lvl9pPr>
           </a:lstStyle>
           <a:p>
@@ -254,7 +254,7 @@
           <a:p>
             <a:fld id="{F12C0B07-0FC7-4E58-8B17-56F7BBB1B296}" type="datetimeFigureOut">
               <a:rPr lang="bg-BG" smtClean="0"/>
-              <a:t>24.10.2025 г.</a:t>
+              <a:t>26/10/2025</a:t>
             </a:fld>
             <a:endParaRPr lang="bg-BG"/>
           </a:p>
@@ -424,7 +424,7 @@
           <a:p>
             <a:fld id="{F12C0B07-0FC7-4E58-8B17-56F7BBB1B296}" type="datetimeFigureOut">
               <a:rPr lang="bg-BG" smtClean="0"/>
-              <a:t>24.10.2025 г.</a:t>
+              <a:t>26/10/2025</a:t>
             </a:fld>
             <a:endParaRPr lang="bg-BG"/>
           </a:p>
@@ -514,8 +514,8 @@
         </p:nvSpPr>
         <p:spPr>
           <a:xfrm>
-            <a:off x="8724900" y="365125"/>
-            <a:ext cx="2628900" cy="5811838"/>
+            <a:off x="6543676" y="273844"/>
+            <a:ext cx="1971675" cy="4358879"/>
           </a:xfrm>
         </p:spPr>
         <p:txBody>
@@ -542,8 +542,8 @@
         </p:nvSpPr>
         <p:spPr>
           <a:xfrm>
-            <a:off x="838200" y="365125"/>
-            <a:ext cx="7734300" cy="5811838"/>
+            <a:off x="628652" y="273844"/>
+            <a:ext cx="5800725" cy="4358879"/>
           </a:xfrm>
         </p:spPr>
         <p:txBody>
@@ -604,7 +604,7 @@
           <a:p>
             <a:fld id="{F12C0B07-0FC7-4E58-8B17-56F7BBB1B296}" type="datetimeFigureOut">
               <a:rPr lang="bg-BG" smtClean="0"/>
-              <a:t>24.10.2025 г.</a:t>
+              <a:t>26/10/2025</a:t>
             </a:fld>
             <a:endParaRPr lang="bg-BG"/>
           </a:p>
@@ -774,7 +774,7 @@
           <a:p>
             <a:fld id="{F12C0B07-0FC7-4E58-8B17-56F7BBB1B296}" type="datetimeFigureOut">
               <a:rPr lang="bg-BG" smtClean="0"/>
-              <a:t>24.10.2025 г.</a:t>
+              <a:t>26/10/2025</a:t>
             </a:fld>
             <a:endParaRPr lang="bg-BG"/>
           </a:p>
@@ -864,15 +864,15 @@
         </p:nvSpPr>
         <p:spPr>
           <a:xfrm>
-            <a:off x="831850" y="1709738"/>
-            <a:ext cx="10515600" cy="2852737"/>
+            <a:off x="623888" y="1282306"/>
+            <a:ext cx="7886700" cy="2139553"/>
           </a:xfrm>
         </p:spPr>
         <p:txBody>
           <a:bodyPr anchor="b"/>
           <a:lstStyle>
             <a:lvl1pPr>
-              <a:defRPr sz="6000"/>
+              <a:defRPr sz="4500"/>
             </a:lvl1pPr>
           </a:lstStyle>
           <a:p>
@@ -896,8 +896,8 @@
         </p:nvSpPr>
         <p:spPr>
           <a:xfrm>
-            <a:off x="831850" y="4589463"/>
-            <a:ext cx="10515600" cy="1500187"/>
+            <a:off x="623888" y="3442099"/>
+            <a:ext cx="7886700" cy="1125140"/>
           </a:xfrm>
         </p:spPr>
         <p:txBody>
@@ -905,7 +905,7 @@
           <a:lstStyle>
             <a:lvl1pPr marL="0" indent="0">
               <a:buNone/>
-              <a:defRPr sz="2400">
+              <a:defRPr sz="1800">
                 <a:solidFill>
                   <a:schemeClr val="tx1">
                     <a:tint val="75000"/>
@@ -913,9 +913,9 @@
                 </a:solidFill>
               </a:defRPr>
             </a:lvl1pPr>
-            <a:lvl2pPr marL="457200" indent="0">
-              <a:buNone/>
-              <a:defRPr sz="2000">
+            <a:lvl2pPr marL="342848" indent="0">
+              <a:buNone/>
+              <a:defRPr sz="1500">
                 <a:solidFill>
                   <a:schemeClr val="tx1">
                     <a:tint val="75000"/>
@@ -923,9 +923,9 @@
                 </a:solidFill>
               </a:defRPr>
             </a:lvl2pPr>
-            <a:lvl3pPr marL="914400" indent="0">
-              <a:buNone/>
-              <a:defRPr sz="1800">
+            <a:lvl3pPr marL="685697" indent="0">
+              <a:buNone/>
+              <a:defRPr sz="1400">
                 <a:solidFill>
                   <a:schemeClr val="tx1">
                     <a:tint val="75000"/>
@@ -933,9 +933,9 @@
                 </a:solidFill>
               </a:defRPr>
             </a:lvl3pPr>
-            <a:lvl4pPr marL="1371600" indent="0">
-              <a:buNone/>
-              <a:defRPr sz="1600">
+            <a:lvl4pPr marL="1028546" indent="0">
+              <a:buNone/>
+              <a:defRPr sz="1200">
                 <a:solidFill>
                   <a:schemeClr val="tx1">
                     <a:tint val="75000"/>
@@ -943,9 +943,9 @@
                 </a:solidFill>
               </a:defRPr>
             </a:lvl4pPr>
-            <a:lvl5pPr marL="1828800" indent="0">
-              <a:buNone/>
-              <a:defRPr sz="1600">
+            <a:lvl5pPr marL="1371394" indent="0">
+              <a:buNone/>
+              <a:defRPr sz="1200">
                 <a:solidFill>
                   <a:schemeClr val="tx1">
                     <a:tint val="75000"/>
@@ -953,9 +953,9 @@
                 </a:solidFill>
               </a:defRPr>
             </a:lvl5pPr>
-            <a:lvl6pPr marL="2286000" indent="0">
-              <a:buNone/>
-              <a:defRPr sz="1600">
+            <a:lvl6pPr marL="1714243" indent="0">
+              <a:buNone/>
+              <a:defRPr sz="1200">
                 <a:solidFill>
                   <a:schemeClr val="tx1">
                     <a:tint val="75000"/>
@@ -963,9 +963,9 @@
                 </a:solidFill>
               </a:defRPr>
             </a:lvl6pPr>
-            <a:lvl7pPr marL="2743200" indent="0">
-              <a:buNone/>
-              <a:defRPr sz="1600">
+            <a:lvl7pPr marL="2057091" indent="0">
+              <a:buNone/>
+              <a:defRPr sz="1200">
                 <a:solidFill>
                   <a:schemeClr val="tx1">
                     <a:tint val="75000"/>
@@ -973,9 +973,9 @@
                 </a:solidFill>
               </a:defRPr>
             </a:lvl7pPr>
-            <a:lvl8pPr marL="3200400" indent="0">
-              <a:buNone/>
-              <a:defRPr sz="1600">
+            <a:lvl8pPr marL="2399940" indent="0">
+              <a:buNone/>
+              <a:defRPr sz="1200">
                 <a:solidFill>
                   <a:schemeClr val="tx1">
                     <a:tint val="75000"/>
@@ -983,9 +983,9 @@
                 </a:solidFill>
               </a:defRPr>
             </a:lvl8pPr>
-            <a:lvl9pPr marL="3657600" indent="0">
-              <a:buNone/>
-              <a:defRPr sz="1600">
+            <a:lvl9pPr marL="2742789" indent="0">
+              <a:buNone/>
+              <a:defRPr sz="1200">
                 <a:solidFill>
                   <a:schemeClr val="tx1">
                     <a:tint val="75000"/>
@@ -1020,7 +1020,7 @@
           <a:p>
             <a:fld id="{F12C0B07-0FC7-4E58-8B17-56F7BBB1B296}" type="datetimeFigureOut">
               <a:rPr lang="bg-BG" smtClean="0"/>
-              <a:t>24.10.2025 г.</a:t>
+              <a:t>26/10/2025</a:t>
             </a:fld>
             <a:endParaRPr lang="bg-BG"/>
           </a:p>
@@ -1133,8 +1133,8 @@
         </p:nvSpPr>
         <p:spPr>
           <a:xfrm>
-            <a:off x="838200" y="1825625"/>
-            <a:ext cx="5181600" cy="4351338"/>
+            <a:off x="628651" y="1369219"/>
+            <a:ext cx="3886200" cy="3263504"/>
           </a:xfrm>
         </p:spPr>
         <p:txBody>
@@ -1190,8 +1190,8 @@
         </p:nvSpPr>
         <p:spPr>
           <a:xfrm>
-            <a:off x="6172200" y="1825625"/>
-            <a:ext cx="5181600" cy="4351338"/>
+            <a:off x="4629150" y="1369219"/>
+            <a:ext cx="3886200" cy="3263504"/>
           </a:xfrm>
         </p:spPr>
         <p:txBody>
@@ -1252,7 +1252,7 @@
           <a:p>
             <a:fld id="{F12C0B07-0FC7-4E58-8B17-56F7BBB1B296}" type="datetimeFigureOut">
               <a:rPr lang="bg-BG" smtClean="0"/>
-              <a:t>24.10.2025 г.</a:t>
+              <a:t>26/10/2025</a:t>
             </a:fld>
             <a:endParaRPr lang="bg-BG"/>
           </a:p>
@@ -1342,8 +1342,8 @@
         </p:nvSpPr>
         <p:spPr>
           <a:xfrm>
-            <a:off x="839788" y="365125"/>
-            <a:ext cx="10515600" cy="1325563"/>
+            <a:off x="629842" y="273847"/>
+            <a:ext cx="7886700" cy="994172"/>
           </a:xfrm>
         </p:spPr>
         <p:txBody>
@@ -1370,8 +1370,8 @@
         </p:nvSpPr>
         <p:spPr>
           <a:xfrm>
-            <a:off x="839788" y="1681163"/>
-            <a:ext cx="5157787" cy="823912"/>
+            <a:off x="629842" y="1260872"/>
+            <a:ext cx="3868340" cy="617934"/>
           </a:xfrm>
         </p:spPr>
         <p:txBody>
@@ -1379,39 +1379,39 @@
           <a:lstStyle>
             <a:lvl1pPr marL="0" indent="0">
               <a:buNone/>
-              <a:defRPr sz="2400" b="1"/>
+              <a:defRPr sz="1800" b="1"/>
             </a:lvl1pPr>
-            <a:lvl2pPr marL="457200" indent="0">
-              <a:buNone/>
-              <a:defRPr sz="2000" b="1"/>
+            <a:lvl2pPr marL="342848" indent="0">
+              <a:buNone/>
+              <a:defRPr sz="1500" b="1"/>
             </a:lvl2pPr>
-            <a:lvl3pPr marL="914400" indent="0">
-              <a:buNone/>
-              <a:defRPr sz="1800" b="1"/>
+            <a:lvl3pPr marL="685697" indent="0">
+              <a:buNone/>
+              <a:defRPr sz="1400" b="1"/>
             </a:lvl3pPr>
-            <a:lvl4pPr marL="1371600" indent="0">
-              <a:buNone/>
-              <a:defRPr sz="1600" b="1"/>
+            <a:lvl4pPr marL="1028546" indent="0">
+              <a:buNone/>
+              <a:defRPr sz="1200" b="1"/>
             </a:lvl4pPr>
-            <a:lvl5pPr marL="1828800" indent="0">
-              <a:buNone/>
-              <a:defRPr sz="1600" b="1"/>
+            <a:lvl5pPr marL="1371394" indent="0">
+              <a:buNone/>
+              <a:defRPr sz="1200" b="1"/>
             </a:lvl5pPr>
-            <a:lvl6pPr marL="2286000" indent="0">
-              <a:buNone/>
-              <a:defRPr sz="1600" b="1"/>
+            <a:lvl6pPr marL="1714243" indent="0">
+              <a:buNone/>
+              <a:defRPr sz="1200" b="1"/>
             </a:lvl6pPr>
-            <a:lvl7pPr marL="2743200" indent="0">
-              <a:buNone/>
-              <a:defRPr sz="1600" b="1"/>
+            <a:lvl7pPr marL="2057091" indent="0">
+              <a:buNone/>
+              <a:defRPr sz="1200" b="1"/>
             </a:lvl7pPr>
-            <a:lvl8pPr marL="3200400" indent="0">
-              <a:buNone/>
-              <a:defRPr sz="1600" b="1"/>
+            <a:lvl8pPr marL="2399940" indent="0">
+              <a:buNone/>
+              <a:defRPr sz="1200" b="1"/>
             </a:lvl8pPr>
-            <a:lvl9pPr marL="3657600" indent="0">
-              <a:buNone/>
-              <a:defRPr sz="1600" b="1"/>
+            <a:lvl9pPr marL="2742789" indent="0">
+              <a:buNone/>
+              <a:defRPr sz="1200" b="1"/>
             </a:lvl9pPr>
           </a:lstStyle>
           <a:p>
@@ -1435,8 +1435,8 @@
         </p:nvSpPr>
         <p:spPr>
           <a:xfrm>
-            <a:off x="839788" y="2505075"/>
-            <a:ext cx="5157787" cy="3684588"/>
+            <a:off x="629842" y="1878806"/>
+            <a:ext cx="3868340" cy="2763441"/>
           </a:xfrm>
         </p:spPr>
         <p:txBody>
@@ -1492,8 +1492,8 @@
         </p:nvSpPr>
         <p:spPr>
           <a:xfrm>
-            <a:off x="6172200" y="1681163"/>
-            <a:ext cx="5183188" cy="823912"/>
+            <a:off x="4629152" y="1260872"/>
+            <a:ext cx="3887391" cy="617934"/>
           </a:xfrm>
         </p:spPr>
         <p:txBody>
@@ -1501,39 +1501,39 @@
           <a:lstStyle>
             <a:lvl1pPr marL="0" indent="0">
               <a:buNone/>
-              <a:defRPr sz="2400" b="1"/>
+              <a:defRPr sz="1800" b="1"/>
             </a:lvl1pPr>
-            <a:lvl2pPr marL="457200" indent="0">
-              <a:buNone/>
-              <a:defRPr sz="2000" b="1"/>
+            <a:lvl2pPr marL="342848" indent="0">
+              <a:buNone/>
+              <a:defRPr sz="1500" b="1"/>
             </a:lvl2pPr>
-            <a:lvl3pPr marL="914400" indent="0">
-              <a:buNone/>
-              <a:defRPr sz="1800" b="1"/>
+            <a:lvl3pPr marL="685697" indent="0">
+              <a:buNone/>
+              <a:defRPr sz="1400" b="1"/>
             </a:lvl3pPr>
-            <a:lvl4pPr marL="1371600" indent="0">
-              <a:buNone/>
-              <a:defRPr sz="1600" b="1"/>
+            <a:lvl4pPr marL="1028546" indent="0">
+              <a:buNone/>
+              <a:defRPr sz="1200" b="1"/>
             </a:lvl4pPr>
-            <a:lvl5pPr marL="1828800" indent="0">
-              <a:buNone/>
-              <a:defRPr sz="1600" b="1"/>
+            <a:lvl5pPr marL="1371394" indent="0">
+              <a:buNone/>
+              <a:defRPr sz="1200" b="1"/>
             </a:lvl5pPr>
-            <a:lvl6pPr marL="2286000" indent="0">
-              <a:buNone/>
-              <a:defRPr sz="1600" b="1"/>
+            <a:lvl6pPr marL="1714243" indent="0">
+              <a:buNone/>
+              <a:defRPr sz="1200" b="1"/>
             </a:lvl6pPr>
-            <a:lvl7pPr marL="2743200" indent="0">
-              <a:buNone/>
-              <a:defRPr sz="1600" b="1"/>
+            <a:lvl7pPr marL="2057091" indent="0">
+              <a:buNone/>
+              <a:defRPr sz="1200" b="1"/>
             </a:lvl7pPr>
-            <a:lvl8pPr marL="3200400" indent="0">
-              <a:buNone/>
-              <a:defRPr sz="1600" b="1"/>
+            <a:lvl8pPr marL="2399940" indent="0">
+              <a:buNone/>
+              <a:defRPr sz="1200" b="1"/>
             </a:lvl8pPr>
-            <a:lvl9pPr marL="3657600" indent="0">
-              <a:buNone/>
-              <a:defRPr sz="1600" b="1"/>
+            <a:lvl9pPr marL="2742789" indent="0">
+              <a:buNone/>
+              <a:defRPr sz="1200" b="1"/>
             </a:lvl9pPr>
           </a:lstStyle>
           <a:p>
@@ -1557,8 +1557,8 @@
         </p:nvSpPr>
         <p:spPr>
           <a:xfrm>
-            <a:off x="6172200" y="2505075"/>
-            <a:ext cx="5183188" cy="3684588"/>
+            <a:off x="4629152" y="1878806"/>
+            <a:ext cx="3887391" cy="2763441"/>
           </a:xfrm>
         </p:spPr>
         <p:txBody>
@@ -1619,7 +1619,7 @@
           <a:p>
             <a:fld id="{F12C0B07-0FC7-4E58-8B17-56F7BBB1B296}" type="datetimeFigureOut">
               <a:rPr lang="bg-BG" smtClean="0"/>
-              <a:t>24.10.2025 г.</a:t>
+              <a:t>26/10/2025</a:t>
             </a:fld>
             <a:endParaRPr lang="bg-BG"/>
           </a:p>
@@ -1737,7 +1737,7 @@
           <a:p>
             <a:fld id="{F12C0B07-0FC7-4E58-8B17-56F7BBB1B296}" type="datetimeFigureOut">
               <a:rPr lang="bg-BG" smtClean="0"/>
-              <a:t>24.10.2025 г.</a:t>
+              <a:t>26/10/2025</a:t>
             </a:fld>
             <a:endParaRPr lang="bg-BG"/>
           </a:p>
@@ -1832,7 +1832,7 @@
           <a:p>
             <a:fld id="{F12C0B07-0FC7-4E58-8B17-56F7BBB1B296}" type="datetimeFigureOut">
               <a:rPr lang="bg-BG" smtClean="0"/>
-              <a:t>24.10.2025 г.</a:t>
+              <a:t>26/10/2025</a:t>
             </a:fld>
             <a:endParaRPr lang="bg-BG"/>
           </a:p>
@@ -1922,15 +1922,15 @@
         </p:nvSpPr>
         <p:spPr>
           <a:xfrm>
-            <a:off x="839788" y="457200"/>
-            <a:ext cx="3932237" cy="1600200"/>
+            <a:off x="629841" y="342900"/>
+            <a:ext cx="2949178" cy="1200150"/>
           </a:xfrm>
         </p:spPr>
         <p:txBody>
           <a:bodyPr anchor="b"/>
           <a:lstStyle>
             <a:lvl1pPr>
-              <a:defRPr sz="3200"/>
+              <a:defRPr sz="2400"/>
             </a:lvl1pPr>
           </a:lstStyle>
           <a:p>
@@ -1954,39 +1954,39 @@
         </p:nvSpPr>
         <p:spPr>
           <a:xfrm>
-            <a:off x="5183188" y="987425"/>
-            <a:ext cx="6172200" cy="4873625"/>
+            <a:off x="3887391" y="740571"/>
+            <a:ext cx="4629150" cy="3655219"/>
           </a:xfrm>
         </p:spPr>
         <p:txBody>
           <a:bodyPr/>
           <a:lstStyle>
             <a:lvl1pPr>
-              <a:defRPr sz="3200"/>
+              <a:defRPr sz="2400"/>
             </a:lvl1pPr>
             <a:lvl2pPr>
-              <a:defRPr sz="2800"/>
+              <a:defRPr sz="2100"/>
             </a:lvl2pPr>
             <a:lvl3pPr>
-              <a:defRPr sz="2400"/>
+              <a:defRPr sz="1800"/>
             </a:lvl3pPr>
             <a:lvl4pPr>
-              <a:defRPr sz="2000"/>
+              <a:defRPr sz="1500"/>
             </a:lvl4pPr>
             <a:lvl5pPr>
-              <a:defRPr sz="2000"/>
+              <a:defRPr sz="1500"/>
             </a:lvl5pPr>
             <a:lvl6pPr>
-              <a:defRPr sz="2000"/>
+              <a:defRPr sz="1500"/>
             </a:lvl6pPr>
             <a:lvl7pPr>
-              <a:defRPr sz="2000"/>
+              <a:defRPr sz="1500"/>
             </a:lvl7pPr>
             <a:lvl8pPr>
-              <a:defRPr sz="2000"/>
+              <a:defRPr sz="1500"/>
             </a:lvl8pPr>
             <a:lvl9pPr>
-              <a:defRPr sz="2000"/>
+              <a:defRPr sz="1500"/>
             </a:lvl9pPr>
           </a:lstStyle>
           <a:p>
@@ -2039,8 +2039,8 @@
         </p:nvSpPr>
         <p:spPr>
           <a:xfrm>
-            <a:off x="839788" y="2057400"/>
-            <a:ext cx="3932237" cy="3811588"/>
+            <a:off x="629841" y="1543051"/>
+            <a:ext cx="2949178" cy="2858691"/>
           </a:xfrm>
         </p:spPr>
         <p:txBody>
@@ -2048,39 +2048,39 @@
           <a:lstStyle>
             <a:lvl1pPr marL="0" indent="0">
               <a:buNone/>
-              <a:defRPr sz="1600"/>
+              <a:defRPr sz="1200"/>
             </a:lvl1pPr>
-            <a:lvl2pPr marL="457200" indent="0">
-              <a:buNone/>
-              <a:defRPr sz="1400"/>
+            <a:lvl2pPr marL="342848" indent="0">
+              <a:buNone/>
+              <a:defRPr sz="1100"/>
             </a:lvl2pPr>
-            <a:lvl3pPr marL="914400" indent="0">
-              <a:buNone/>
-              <a:defRPr sz="1200"/>
+            <a:lvl3pPr marL="685697" indent="0">
+              <a:buNone/>
+              <a:defRPr sz="900"/>
             </a:lvl3pPr>
-            <a:lvl4pPr marL="1371600" indent="0">
-              <a:buNone/>
-              <a:defRPr sz="1000"/>
+            <a:lvl4pPr marL="1028546" indent="0">
+              <a:buNone/>
+              <a:defRPr sz="800"/>
             </a:lvl4pPr>
-            <a:lvl5pPr marL="1828800" indent="0">
-              <a:buNone/>
-              <a:defRPr sz="1000"/>
+            <a:lvl5pPr marL="1371394" indent="0">
+              <a:buNone/>
+              <a:defRPr sz="800"/>
             </a:lvl5pPr>
-            <a:lvl6pPr marL="2286000" indent="0">
-              <a:buNone/>
-              <a:defRPr sz="1000"/>
+            <a:lvl6pPr marL="1714243" indent="0">
+              <a:buNone/>
+              <a:defRPr sz="800"/>
             </a:lvl6pPr>
-            <a:lvl7pPr marL="2743200" indent="0">
-              <a:buNone/>
-              <a:defRPr sz="1000"/>
+            <a:lvl7pPr marL="2057091" indent="0">
+              <a:buNone/>
+              <a:defRPr sz="800"/>
             </a:lvl7pPr>
-            <a:lvl8pPr marL="3200400" indent="0">
-              <a:buNone/>
-              <a:defRPr sz="1000"/>
+            <a:lvl8pPr marL="2399940" indent="0">
+              <a:buNone/>
+              <a:defRPr sz="800"/>
             </a:lvl8pPr>
-            <a:lvl9pPr marL="3657600" indent="0">
-              <a:buNone/>
-              <a:defRPr sz="1000"/>
+            <a:lvl9pPr marL="2742789" indent="0">
+              <a:buNone/>
+              <a:defRPr sz="800"/>
             </a:lvl9pPr>
           </a:lstStyle>
           <a:p>
@@ -2109,7 +2109,7 @@
           <a:p>
             <a:fld id="{F12C0B07-0FC7-4E58-8B17-56F7BBB1B296}" type="datetimeFigureOut">
               <a:rPr lang="bg-BG" smtClean="0"/>
-              <a:t>24.10.2025 г.</a:t>
+              <a:t>26/10/2025</a:t>
             </a:fld>
             <a:endParaRPr lang="bg-BG"/>
           </a:p>
@@ -2199,15 +2199,15 @@
         </p:nvSpPr>
         <p:spPr>
           <a:xfrm>
-            <a:off x="839788" y="457200"/>
-            <a:ext cx="3932237" cy="1600200"/>
+            <a:off x="629841" y="342900"/>
+            <a:ext cx="2949178" cy="1200150"/>
           </a:xfrm>
         </p:spPr>
         <p:txBody>
           <a:bodyPr anchor="b"/>
           <a:lstStyle>
             <a:lvl1pPr>
-              <a:defRPr sz="3200"/>
+              <a:defRPr sz="2400"/>
             </a:lvl1pPr>
           </a:lstStyle>
           <a:p>
@@ -2231,8 +2231,8 @@
         </p:nvSpPr>
         <p:spPr>
           <a:xfrm>
-            <a:off x="5183188" y="987425"/>
-            <a:ext cx="6172200" cy="4873625"/>
+            <a:off x="3887391" y="740571"/>
+            <a:ext cx="4629150" cy="3655219"/>
           </a:xfrm>
         </p:spPr>
         <p:txBody>
@@ -2240,39 +2240,39 @@
           <a:lstStyle>
             <a:lvl1pPr marL="0" indent="0">
               <a:buNone/>
-              <a:defRPr sz="3200"/>
+              <a:defRPr sz="2400"/>
             </a:lvl1pPr>
-            <a:lvl2pPr marL="457200" indent="0">
-              <a:buNone/>
-              <a:defRPr sz="2800"/>
+            <a:lvl2pPr marL="342848" indent="0">
+              <a:buNone/>
+              <a:defRPr sz="2100"/>
             </a:lvl2pPr>
-            <a:lvl3pPr marL="914400" indent="0">
-              <a:buNone/>
-              <a:defRPr sz="2400"/>
+            <a:lvl3pPr marL="685697" indent="0">
+              <a:buNone/>
+              <a:defRPr sz="1800"/>
             </a:lvl3pPr>
-            <a:lvl4pPr marL="1371600" indent="0">
-              <a:buNone/>
-              <a:defRPr sz="2000"/>
+            <a:lvl4pPr marL="1028546" indent="0">
+              <a:buNone/>
+              <a:defRPr sz="1500"/>
             </a:lvl4pPr>
-            <a:lvl5pPr marL="1828800" indent="0">
-              <a:buNone/>
-              <a:defRPr sz="2000"/>
+            <a:lvl5pPr marL="1371394" indent="0">
+              <a:buNone/>
+              <a:defRPr sz="1500"/>
             </a:lvl5pPr>
-            <a:lvl6pPr marL="2286000" indent="0">
-              <a:buNone/>
-              <a:defRPr sz="2000"/>
+            <a:lvl6pPr marL="1714243" indent="0">
+              <a:buNone/>
+              <a:defRPr sz="1500"/>
             </a:lvl6pPr>
-            <a:lvl7pPr marL="2743200" indent="0">
-              <a:buNone/>
-              <a:defRPr sz="2000"/>
+            <a:lvl7pPr marL="2057091" indent="0">
+              <a:buNone/>
+              <a:defRPr sz="1500"/>
             </a:lvl7pPr>
-            <a:lvl8pPr marL="3200400" indent="0">
-              <a:buNone/>
-              <a:defRPr sz="2000"/>
+            <a:lvl8pPr marL="2399940" indent="0">
+              <a:buNone/>
+              <a:defRPr sz="1500"/>
             </a:lvl8pPr>
-            <a:lvl9pPr marL="3657600" indent="0">
-              <a:buNone/>
-              <a:defRPr sz="2000"/>
+            <a:lvl9pPr marL="2742789" indent="0">
+              <a:buNone/>
+              <a:defRPr sz="1500"/>
             </a:lvl9pPr>
           </a:lstStyle>
           <a:p>
@@ -2292,8 +2292,8 @@
         </p:nvSpPr>
         <p:spPr>
           <a:xfrm>
-            <a:off x="839788" y="2057400"/>
-            <a:ext cx="3932237" cy="3811588"/>
+            <a:off x="629841" y="1543051"/>
+            <a:ext cx="2949178" cy="2858691"/>
           </a:xfrm>
         </p:spPr>
         <p:txBody>
@@ -2301,39 +2301,39 @@
           <a:lstStyle>
             <a:lvl1pPr marL="0" indent="0">
               <a:buNone/>
-              <a:defRPr sz="1600"/>
+              <a:defRPr sz="1200"/>
             </a:lvl1pPr>
-            <a:lvl2pPr marL="457200" indent="0">
-              <a:buNone/>
-              <a:defRPr sz="1400"/>
+            <a:lvl2pPr marL="342848" indent="0">
+              <a:buNone/>
+              <a:defRPr sz="1100"/>
             </a:lvl2pPr>
-            <a:lvl3pPr marL="914400" indent="0">
-              <a:buNone/>
-              <a:defRPr sz="1200"/>
+            <a:lvl3pPr marL="685697" indent="0">
+              <a:buNone/>
+              <a:defRPr sz="900"/>
             </a:lvl3pPr>
-            <a:lvl4pPr marL="1371600" indent="0">
-              <a:buNone/>
-              <a:defRPr sz="1000"/>
+            <a:lvl4pPr marL="1028546" indent="0">
+              <a:buNone/>
+              <a:defRPr sz="800"/>
             </a:lvl4pPr>
-            <a:lvl5pPr marL="1828800" indent="0">
-              <a:buNone/>
-              <a:defRPr sz="1000"/>
+            <a:lvl5pPr marL="1371394" indent="0">
+              <a:buNone/>
+              <a:defRPr sz="800"/>
             </a:lvl5pPr>
-            <a:lvl6pPr marL="2286000" indent="0">
-              <a:buNone/>
-              <a:defRPr sz="1000"/>
+            <a:lvl6pPr marL="1714243" indent="0">
+              <a:buNone/>
+              <a:defRPr sz="800"/>
             </a:lvl6pPr>
-            <a:lvl7pPr marL="2743200" indent="0">
-              <a:buNone/>
-              <a:defRPr sz="1000"/>
+            <a:lvl7pPr marL="2057091" indent="0">
+              <a:buNone/>
+              <a:defRPr sz="800"/>
             </a:lvl7pPr>
-            <a:lvl8pPr marL="3200400" indent="0">
-              <a:buNone/>
-              <a:defRPr sz="1000"/>
+            <a:lvl8pPr marL="2399940" indent="0">
+              <a:buNone/>
+              <a:defRPr sz="800"/>
             </a:lvl8pPr>
-            <a:lvl9pPr marL="3657600" indent="0">
-              <a:buNone/>
-              <a:defRPr sz="1000"/>
+            <a:lvl9pPr marL="2742789" indent="0">
+              <a:buNone/>
+              <a:defRPr sz="800"/>
             </a:lvl9pPr>
           </a:lstStyle>
           <a:p>
@@ -2362,7 +2362,7 @@
           <a:p>
             <a:fld id="{F12C0B07-0FC7-4E58-8B17-56F7BBB1B296}" type="datetimeFigureOut">
               <a:rPr lang="bg-BG" smtClean="0"/>
-              <a:t>24.10.2025 г.</a:t>
+              <a:t>26/10/2025</a:t>
             </a:fld>
             <a:endParaRPr lang="bg-BG"/>
           </a:p>
@@ -2457,15 +2457,15 @@
         </p:nvSpPr>
         <p:spPr>
           <a:xfrm>
-            <a:off x="838200" y="365125"/>
-            <a:ext cx="10515600" cy="1325563"/>
+            <a:off x="628650" y="273847"/>
+            <a:ext cx="7886700" cy="994172"/>
           </a:xfrm>
           <a:prstGeom prst="rect">
             <a:avLst/>
           </a:prstGeom>
         </p:spPr>
         <p:txBody>
-          <a:bodyPr vert="horz" lIns="91440" tIns="45720" rIns="91440" bIns="45720" rtlCol="0" anchor="ctr">
+          <a:bodyPr vert="horz" lIns="68570" tIns="34285" rIns="68570" bIns="34285" rtlCol="0" anchor="ctr">
             <a:normAutofit/>
           </a:bodyPr>
           <a:lstStyle/>
@@ -2490,15 +2490,15 @@
         </p:nvSpPr>
         <p:spPr>
           <a:xfrm>
-            <a:off x="838200" y="1825625"/>
-            <a:ext cx="10515600" cy="4351338"/>
+            <a:off x="628650" y="1369219"/>
+            <a:ext cx="7886700" cy="3263504"/>
           </a:xfrm>
           <a:prstGeom prst="rect">
             <a:avLst/>
           </a:prstGeom>
         </p:spPr>
         <p:txBody>
-          <a:bodyPr vert="horz" lIns="91440" tIns="45720" rIns="91440" bIns="45720" rtlCol="0">
+          <a:bodyPr vert="horz" lIns="68570" tIns="34285" rIns="68570" bIns="34285" rtlCol="0">
             <a:normAutofit/>
           </a:bodyPr>
           <a:lstStyle/>
@@ -2552,18 +2552,18 @@
         </p:nvSpPr>
         <p:spPr>
           <a:xfrm>
-            <a:off x="838200" y="6356350"/>
-            <a:ext cx="2743200" cy="365125"/>
+            <a:off x="628650" y="4767265"/>
+            <a:ext cx="2057400" cy="273844"/>
           </a:xfrm>
           <a:prstGeom prst="rect">
             <a:avLst/>
           </a:prstGeom>
         </p:spPr>
         <p:txBody>
-          <a:bodyPr vert="horz" lIns="91440" tIns="45720" rIns="91440" bIns="45720" rtlCol="0" anchor="ctr"/>
+          <a:bodyPr vert="horz" lIns="68570" tIns="34285" rIns="68570" bIns="34285" rtlCol="0" anchor="ctr"/>
           <a:lstStyle>
             <a:lvl1pPr algn="l">
-              <a:defRPr sz="1200">
+              <a:defRPr sz="900">
                 <a:solidFill>
                   <a:schemeClr val="tx1">
                     <a:tint val="75000"/>
@@ -2575,7 +2575,7 @@
           <a:p>
             <a:fld id="{F12C0B07-0FC7-4E58-8B17-56F7BBB1B296}" type="datetimeFigureOut">
               <a:rPr lang="bg-BG" smtClean="0"/>
-              <a:t>24.10.2025 г.</a:t>
+              <a:t>26/10/2025</a:t>
             </a:fld>
             <a:endParaRPr lang="bg-BG"/>
           </a:p>
@@ -2593,18 +2593,18 @@
         </p:nvSpPr>
         <p:spPr>
           <a:xfrm>
-            <a:off x="4038600" y="6356350"/>
-            <a:ext cx="4114800" cy="365125"/>
+            <a:off x="3028950" y="4767265"/>
+            <a:ext cx="3086100" cy="273844"/>
           </a:xfrm>
           <a:prstGeom prst="rect">
             <a:avLst/>
           </a:prstGeom>
         </p:spPr>
         <p:txBody>
-          <a:bodyPr vert="horz" lIns="91440" tIns="45720" rIns="91440" bIns="45720" rtlCol="0" anchor="ctr"/>
+          <a:bodyPr vert="horz" lIns="68570" tIns="34285" rIns="68570" bIns="34285" rtlCol="0" anchor="ctr"/>
           <a:lstStyle>
             <a:lvl1pPr algn="ctr">
-              <a:defRPr sz="1200">
+              <a:defRPr sz="900">
                 <a:solidFill>
                   <a:schemeClr val="tx1">
                     <a:tint val="75000"/>
@@ -2630,18 +2630,18 @@
         </p:nvSpPr>
         <p:spPr>
           <a:xfrm>
-            <a:off x="8610600" y="6356350"/>
-            <a:ext cx="2743200" cy="365125"/>
+            <a:off x="6457950" y="4767265"/>
+            <a:ext cx="2057400" cy="273844"/>
           </a:xfrm>
           <a:prstGeom prst="rect">
             <a:avLst/>
           </a:prstGeom>
         </p:spPr>
         <p:txBody>
-          <a:bodyPr vert="horz" lIns="91440" tIns="45720" rIns="91440" bIns="45720" rtlCol="0" anchor="ctr"/>
+          <a:bodyPr vert="horz" lIns="68570" tIns="34285" rIns="68570" bIns="34285" rtlCol="0" anchor="ctr"/>
           <a:lstStyle>
             <a:lvl1pPr algn="r">
-              <a:defRPr sz="1200">
+              <a:defRPr sz="900">
                 <a:solidFill>
                   <a:schemeClr val="tx1">
                     <a:tint val="75000"/>
@@ -2682,7 +2682,7 @@
   </p:sldLayoutIdLst>
   <p:txStyles>
     <p:titleStyle>
-      <a:lvl1pPr algn="l" defTabSz="914400" rtl="0" eaLnBrk="1" latinLnBrk="0" hangingPunct="1">
+      <a:lvl1pPr algn="l" defTabSz="685697" rtl="0" eaLnBrk="1" latinLnBrk="0" hangingPunct="1">
         <a:lnSpc>
           <a:spcPct val="90000"/>
         </a:lnSpc>
@@ -2690,7 +2690,7 @@
           <a:spcPct val="0"/>
         </a:spcBef>
         <a:buNone/>
-        <a:defRPr sz="4400" kern="1200">
+        <a:defRPr sz="3300" kern="1200">
           <a:solidFill>
             <a:schemeClr val="tx1"/>
           </a:solidFill>
@@ -2701,16 +2701,16 @@
       </a:lvl1pPr>
     </p:titleStyle>
     <p:bodyStyle>
-      <a:lvl1pPr marL="228600" indent="-228600" algn="l" defTabSz="914400" rtl="0" eaLnBrk="1" latinLnBrk="0" hangingPunct="1">
+      <a:lvl1pPr marL="171425" indent="-171425" algn="l" defTabSz="685697" rtl="0" eaLnBrk="1" latinLnBrk="0" hangingPunct="1">
         <a:lnSpc>
           <a:spcPct val="90000"/>
         </a:lnSpc>
         <a:spcBef>
-          <a:spcPts val="1000"/>
+          <a:spcPts val="750"/>
         </a:spcBef>
         <a:buFont typeface="Arial" panose="020B0604020202020204" pitchFamily="34" charset="0"/>
         <a:buChar char="•"/>
-        <a:defRPr sz="2800" kern="1200">
+        <a:defRPr sz="2100" kern="1200">
           <a:solidFill>
             <a:schemeClr val="tx1"/>
           </a:solidFill>
@@ -2719,48 +2719,12 @@
           <a:cs typeface="+mn-cs"/>
         </a:defRPr>
       </a:lvl1pPr>
-      <a:lvl2pPr marL="685800" indent="-228600" algn="l" defTabSz="914400" rtl="0" eaLnBrk="1" latinLnBrk="0" hangingPunct="1">
+      <a:lvl2pPr marL="514273" indent="-171425" algn="l" defTabSz="685697" rtl="0" eaLnBrk="1" latinLnBrk="0" hangingPunct="1">
         <a:lnSpc>
           <a:spcPct val="90000"/>
         </a:lnSpc>
         <a:spcBef>
-          <a:spcPts val="500"/>
-        </a:spcBef>
-        <a:buFont typeface="Arial" panose="020B0604020202020204" pitchFamily="34" charset="0"/>
-        <a:buChar char="•"/>
-        <a:defRPr sz="2400" kern="1200">
-          <a:solidFill>
-            <a:schemeClr val="tx1"/>
-          </a:solidFill>
-          <a:latin typeface="+mn-lt"/>
-          <a:ea typeface="+mn-ea"/>
-          <a:cs typeface="+mn-cs"/>
-        </a:defRPr>
-      </a:lvl2pPr>
-      <a:lvl3pPr marL="1143000" indent="-228600" algn="l" defTabSz="914400" rtl="0" eaLnBrk="1" latinLnBrk="0" hangingPunct="1">
-        <a:lnSpc>
-          <a:spcPct val="90000"/>
-        </a:lnSpc>
-        <a:spcBef>
-          <a:spcPts val="500"/>
-        </a:spcBef>
-        <a:buFont typeface="Arial" panose="020B0604020202020204" pitchFamily="34" charset="0"/>
-        <a:buChar char="•"/>
-        <a:defRPr sz="2000" kern="1200">
-          <a:solidFill>
-            <a:schemeClr val="tx1"/>
-          </a:solidFill>
-          <a:latin typeface="+mn-lt"/>
-          <a:ea typeface="+mn-ea"/>
-          <a:cs typeface="+mn-cs"/>
-        </a:defRPr>
-      </a:lvl3pPr>
-      <a:lvl4pPr marL="1600200" indent="-228600" algn="l" defTabSz="914400" rtl="0" eaLnBrk="1" latinLnBrk="0" hangingPunct="1">
-        <a:lnSpc>
-          <a:spcPct val="90000"/>
-        </a:lnSpc>
-        <a:spcBef>
-          <a:spcPts val="500"/>
+          <a:spcPts val="375"/>
         </a:spcBef>
         <a:buFont typeface="Arial" panose="020B0604020202020204" pitchFamily="34" charset="0"/>
         <a:buChar char="•"/>
@@ -2772,17 +2736,53 @@
           <a:ea typeface="+mn-ea"/>
           <a:cs typeface="+mn-cs"/>
         </a:defRPr>
-      </a:lvl4pPr>
-      <a:lvl5pPr marL="2057400" indent="-228600" algn="l" defTabSz="914400" rtl="0" eaLnBrk="1" latinLnBrk="0" hangingPunct="1">
+      </a:lvl2pPr>
+      <a:lvl3pPr marL="857122" indent="-171425" algn="l" defTabSz="685697" rtl="0" eaLnBrk="1" latinLnBrk="0" hangingPunct="1">
         <a:lnSpc>
           <a:spcPct val="90000"/>
         </a:lnSpc>
         <a:spcBef>
-          <a:spcPts val="500"/>
+          <a:spcPts val="375"/>
         </a:spcBef>
         <a:buFont typeface="Arial" panose="020B0604020202020204" pitchFamily="34" charset="0"/>
         <a:buChar char="•"/>
-        <a:defRPr sz="1800" kern="1200">
+        <a:defRPr sz="1500" kern="1200">
+          <a:solidFill>
+            <a:schemeClr val="tx1"/>
+          </a:solidFill>
+          <a:latin typeface="+mn-lt"/>
+          <a:ea typeface="+mn-ea"/>
+          <a:cs typeface="+mn-cs"/>
+        </a:defRPr>
+      </a:lvl3pPr>
+      <a:lvl4pPr marL="1199970" indent="-171425" algn="l" defTabSz="685697" rtl="0" eaLnBrk="1" latinLnBrk="0" hangingPunct="1">
+        <a:lnSpc>
+          <a:spcPct val="90000"/>
+        </a:lnSpc>
+        <a:spcBef>
+          <a:spcPts val="375"/>
+        </a:spcBef>
+        <a:buFont typeface="Arial" panose="020B0604020202020204" pitchFamily="34" charset="0"/>
+        <a:buChar char="•"/>
+        <a:defRPr sz="1400" kern="1200">
+          <a:solidFill>
+            <a:schemeClr val="tx1"/>
+          </a:solidFill>
+          <a:latin typeface="+mn-lt"/>
+          <a:ea typeface="+mn-ea"/>
+          <a:cs typeface="+mn-cs"/>
+        </a:defRPr>
+      </a:lvl4pPr>
+      <a:lvl5pPr marL="1542818" indent="-171425" algn="l" defTabSz="685697" rtl="0" eaLnBrk="1" latinLnBrk="0" hangingPunct="1">
+        <a:lnSpc>
+          <a:spcPct val="90000"/>
+        </a:lnSpc>
+        <a:spcBef>
+          <a:spcPts val="375"/>
+        </a:spcBef>
+        <a:buFont typeface="Arial" panose="020B0604020202020204" pitchFamily="34" charset="0"/>
+        <a:buChar char="•"/>
+        <a:defRPr sz="1400" kern="1200">
           <a:solidFill>
             <a:schemeClr val="tx1"/>
           </a:solidFill>
@@ -2791,16 +2791,16 @@
           <a:cs typeface="+mn-cs"/>
         </a:defRPr>
       </a:lvl5pPr>
-      <a:lvl6pPr marL="2514600" indent="-228600" algn="l" defTabSz="914400" rtl="0" eaLnBrk="1" latinLnBrk="0" hangingPunct="1">
+      <a:lvl6pPr marL="1885667" indent="-171425" algn="l" defTabSz="685697" rtl="0" eaLnBrk="1" latinLnBrk="0" hangingPunct="1">
         <a:lnSpc>
           <a:spcPct val="90000"/>
         </a:lnSpc>
         <a:spcBef>
-          <a:spcPts val="500"/>
+          <a:spcPts val="375"/>
         </a:spcBef>
         <a:buFont typeface="Arial" panose="020B0604020202020204" pitchFamily="34" charset="0"/>
         <a:buChar char="•"/>
-        <a:defRPr sz="1800" kern="1200">
+        <a:defRPr sz="1400" kern="1200">
           <a:solidFill>
             <a:schemeClr val="tx1"/>
           </a:solidFill>
@@ -2809,16 +2809,16 @@
           <a:cs typeface="+mn-cs"/>
         </a:defRPr>
       </a:lvl6pPr>
-      <a:lvl7pPr marL="2971800" indent="-228600" algn="l" defTabSz="914400" rtl="0" eaLnBrk="1" latinLnBrk="0" hangingPunct="1">
+      <a:lvl7pPr marL="2228516" indent="-171425" algn="l" defTabSz="685697" rtl="0" eaLnBrk="1" latinLnBrk="0" hangingPunct="1">
         <a:lnSpc>
           <a:spcPct val="90000"/>
         </a:lnSpc>
         <a:spcBef>
-          <a:spcPts val="500"/>
+          <a:spcPts val="375"/>
         </a:spcBef>
         <a:buFont typeface="Arial" panose="020B0604020202020204" pitchFamily="34" charset="0"/>
         <a:buChar char="•"/>
-        <a:defRPr sz="1800" kern="1200">
+        <a:defRPr sz="1400" kern="1200">
           <a:solidFill>
             <a:schemeClr val="tx1"/>
           </a:solidFill>
@@ -2827,16 +2827,16 @@
           <a:cs typeface="+mn-cs"/>
         </a:defRPr>
       </a:lvl7pPr>
-      <a:lvl8pPr marL="3429000" indent="-228600" algn="l" defTabSz="914400" rtl="0" eaLnBrk="1" latinLnBrk="0" hangingPunct="1">
+      <a:lvl8pPr marL="2571364" indent="-171425" algn="l" defTabSz="685697" rtl="0" eaLnBrk="1" latinLnBrk="0" hangingPunct="1">
         <a:lnSpc>
           <a:spcPct val="90000"/>
         </a:lnSpc>
         <a:spcBef>
-          <a:spcPts val="500"/>
+          <a:spcPts val="375"/>
         </a:spcBef>
         <a:buFont typeface="Arial" panose="020B0604020202020204" pitchFamily="34" charset="0"/>
         <a:buChar char="•"/>
-        <a:defRPr sz="1800" kern="1200">
+        <a:defRPr sz="1400" kern="1200">
           <a:solidFill>
             <a:schemeClr val="tx1"/>
           </a:solidFill>
@@ -2845,16 +2845,16 @@
           <a:cs typeface="+mn-cs"/>
         </a:defRPr>
       </a:lvl8pPr>
-      <a:lvl9pPr marL="3886200" indent="-228600" algn="l" defTabSz="914400" rtl="0" eaLnBrk="1" latinLnBrk="0" hangingPunct="1">
+      <a:lvl9pPr marL="2914213" indent="-171425" algn="l" defTabSz="685697" rtl="0" eaLnBrk="1" latinLnBrk="0" hangingPunct="1">
         <a:lnSpc>
           <a:spcPct val="90000"/>
         </a:lnSpc>
         <a:spcBef>
-          <a:spcPts val="500"/>
+          <a:spcPts val="375"/>
         </a:spcBef>
         <a:buFont typeface="Arial" panose="020B0604020202020204" pitchFamily="34" charset="0"/>
         <a:buChar char="•"/>
-        <a:defRPr sz="1800" kern="1200">
+        <a:defRPr sz="1400" kern="1200">
           <a:solidFill>
             <a:schemeClr val="tx1"/>
           </a:solidFill>
@@ -2868,8 +2868,8 @@
       <a:defPPr>
         <a:defRPr lang="bg-BG"/>
       </a:defPPr>
-      <a:lvl1pPr marL="0" algn="l" defTabSz="914400" rtl="0" eaLnBrk="1" latinLnBrk="0" hangingPunct="1">
-        <a:defRPr sz="1800" kern="1200">
+      <a:lvl1pPr marL="0" algn="l" defTabSz="685697" rtl="0" eaLnBrk="1" latinLnBrk="0" hangingPunct="1">
+        <a:defRPr sz="1400" kern="1200">
           <a:solidFill>
             <a:schemeClr val="tx1"/>
           </a:solidFill>
@@ -2878,8 +2878,8 @@
           <a:cs typeface="+mn-cs"/>
         </a:defRPr>
       </a:lvl1pPr>
-      <a:lvl2pPr marL="457200" algn="l" defTabSz="914400" rtl="0" eaLnBrk="1" latinLnBrk="0" hangingPunct="1">
-        <a:defRPr sz="1800" kern="1200">
+      <a:lvl2pPr marL="342848" algn="l" defTabSz="685697" rtl="0" eaLnBrk="1" latinLnBrk="0" hangingPunct="1">
+        <a:defRPr sz="1400" kern="1200">
           <a:solidFill>
             <a:schemeClr val="tx1"/>
           </a:solidFill>
@@ -2888,8 +2888,8 @@
           <a:cs typeface="+mn-cs"/>
         </a:defRPr>
       </a:lvl2pPr>
-      <a:lvl3pPr marL="914400" algn="l" defTabSz="914400" rtl="0" eaLnBrk="1" latinLnBrk="0" hangingPunct="1">
-        <a:defRPr sz="1800" kern="1200">
+      <a:lvl3pPr marL="685697" algn="l" defTabSz="685697" rtl="0" eaLnBrk="1" latinLnBrk="0" hangingPunct="1">
+        <a:defRPr sz="1400" kern="1200">
           <a:solidFill>
             <a:schemeClr val="tx1"/>
           </a:solidFill>
@@ -2898,8 +2898,8 @@
           <a:cs typeface="+mn-cs"/>
         </a:defRPr>
       </a:lvl3pPr>
-      <a:lvl4pPr marL="1371600" algn="l" defTabSz="914400" rtl="0" eaLnBrk="1" latinLnBrk="0" hangingPunct="1">
-        <a:defRPr sz="1800" kern="1200">
+      <a:lvl4pPr marL="1028546" algn="l" defTabSz="685697" rtl="0" eaLnBrk="1" latinLnBrk="0" hangingPunct="1">
+        <a:defRPr sz="1400" kern="1200">
           <a:solidFill>
             <a:schemeClr val="tx1"/>
           </a:solidFill>
@@ -2908,8 +2908,8 @@
           <a:cs typeface="+mn-cs"/>
         </a:defRPr>
       </a:lvl4pPr>
-      <a:lvl5pPr marL="1828800" algn="l" defTabSz="914400" rtl="0" eaLnBrk="1" latinLnBrk="0" hangingPunct="1">
-        <a:defRPr sz="1800" kern="1200">
+      <a:lvl5pPr marL="1371394" algn="l" defTabSz="685697" rtl="0" eaLnBrk="1" latinLnBrk="0" hangingPunct="1">
+        <a:defRPr sz="1400" kern="1200">
           <a:solidFill>
             <a:schemeClr val="tx1"/>
           </a:solidFill>
@@ -2918,8 +2918,8 @@
           <a:cs typeface="+mn-cs"/>
         </a:defRPr>
       </a:lvl5pPr>
-      <a:lvl6pPr marL="2286000" algn="l" defTabSz="914400" rtl="0" eaLnBrk="1" latinLnBrk="0" hangingPunct="1">
-        <a:defRPr sz="1800" kern="1200">
+      <a:lvl6pPr marL="1714243" algn="l" defTabSz="685697" rtl="0" eaLnBrk="1" latinLnBrk="0" hangingPunct="1">
+        <a:defRPr sz="1400" kern="1200">
           <a:solidFill>
             <a:schemeClr val="tx1"/>
           </a:solidFill>
@@ -2928,8 +2928,8 @@
           <a:cs typeface="+mn-cs"/>
         </a:defRPr>
       </a:lvl6pPr>
-      <a:lvl7pPr marL="2743200" algn="l" defTabSz="914400" rtl="0" eaLnBrk="1" latinLnBrk="0" hangingPunct="1">
-        <a:defRPr sz="1800" kern="1200">
+      <a:lvl7pPr marL="2057091" algn="l" defTabSz="685697" rtl="0" eaLnBrk="1" latinLnBrk="0" hangingPunct="1">
+        <a:defRPr sz="1400" kern="1200">
           <a:solidFill>
             <a:schemeClr val="tx1"/>
           </a:solidFill>
@@ -2938,8 +2938,8 @@
           <a:cs typeface="+mn-cs"/>
         </a:defRPr>
       </a:lvl7pPr>
-      <a:lvl8pPr marL="3200400" algn="l" defTabSz="914400" rtl="0" eaLnBrk="1" latinLnBrk="0" hangingPunct="1">
-        <a:defRPr sz="1800" kern="1200">
+      <a:lvl8pPr marL="2399940" algn="l" defTabSz="685697" rtl="0" eaLnBrk="1" latinLnBrk="0" hangingPunct="1">
+        <a:defRPr sz="1400" kern="1200">
           <a:solidFill>
             <a:schemeClr val="tx1"/>
           </a:solidFill>
@@ -2948,8 +2948,8 @@
           <a:cs typeface="+mn-cs"/>
         </a:defRPr>
       </a:lvl8pPr>
-      <a:lvl9pPr marL="3657600" algn="l" defTabSz="914400" rtl="0" eaLnBrk="1" latinLnBrk="0" hangingPunct="1">
-        <a:defRPr sz="1800" kern="1200">
+      <a:lvl9pPr marL="2742789" algn="l" defTabSz="685697" rtl="0" eaLnBrk="1" latinLnBrk="0" hangingPunct="1">
+        <a:defRPr sz="1400" kern="1200">
           <a:solidFill>
             <a:schemeClr val="tx1"/>
           </a:solidFill>
@@ -2966,6 +2966,20 @@
 <file path=ppt/slides/slide1.xml><?xml version="1.0" encoding="utf-8"?>
 <p:sld xmlns:a="http://schemas.openxmlformats.org/drawingml/2006/main" xmlns:r="http://schemas.openxmlformats.org/officeDocument/2006/relationships" xmlns:p="http://schemas.openxmlformats.org/presentationml/2006/main">
   <p:cSld>
+    <p:bg>
+      <p:bgPr>
+        <a:blipFill dpi="0" rotWithShape="1">
+          <a:blip r:embed="rId2">
+            <a:lum/>
+          </a:blip>
+          <a:srcRect/>
+          <a:stretch>
+            <a:fillRect/>
+          </a:stretch>
+        </a:blipFill>
+        <a:effectLst/>
+      </p:bgPr>
+    </p:bg>
     <p:spTree>
       <p:nvGrpSpPr>
         <p:cNvPr id="1" name=""/>
@@ -2995,7 +3009,7 @@
           <a:bodyPr/>
           <a:lstStyle/>
           <a:p>
-            <a:endParaRPr lang="bg-BG"/>
+            <a:endParaRPr lang="bg-BG" dirty="0"/>
           </a:p>
         </p:txBody>
       </p:sp>
@@ -3018,36 +3032,6 @@
           </a:p>
         </p:txBody>
       </p:sp>
-      <p:pic>
-        <p:nvPicPr>
-          <p:cNvPr id="4" name="Picture 3"/>
-          <p:cNvPicPr>
-            <a:picLocks noChangeAspect="1"/>
-          </p:cNvPicPr>
-          <p:nvPr/>
-        </p:nvPicPr>
-        <p:blipFill>
-          <a:blip r:embed="rId2">
-            <a:extLst>
-              <a:ext uri="{28A0092B-C50C-407E-A947-70E740481C1C}">
-                <a14:useLocalDpi xmlns:a14="http://schemas.microsoft.com/office/drawing/2010/main" val="0"/>
-              </a:ext>
-            </a:extLst>
-          </a:blip>
-          <a:stretch>
-            <a:fillRect/>
-          </a:stretch>
-        </p:blipFill>
-        <p:spPr>
-          <a:xfrm>
-            <a:off x="0" y="0"/>
-            <a:ext cx="12191999" cy="6857999"/>
-          </a:xfrm>
-          <a:prstGeom prst="rect">
-            <a:avLst/>
-          </a:prstGeom>
-        </p:spPr>
-      </p:pic>
     </p:spTree>
     <p:extLst>
       <p:ext uri="{BB962C8B-B14F-4D97-AF65-F5344CB8AC3E}">
@@ -3323,7 +3307,7 @@
   <a:extraClrSchemeLst/>
   <a:extLst>
     <a:ext uri="{05A4C25C-085E-4340-85A3-A5531E510DB2}">
-      <thm15:themeFamily xmlns:thm15="http://schemas.microsoft.com/office/thememl/2012/main" name="Office Theme" id="{62F939B6-93AF-4DB8-9C6B-D6C7DFDC589F}" vid="{4A3C46E8-61CC-4603-A589-7422A47A8E4A}"/>
+      <thm15:themeFamily xmlns:thm15="http://schemas.microsoft.com/office/thememl/2012/main" xmlns="" name="Office Theme" id="{62F939B6-93AF-4DB8-9C6B-D6C7DFDC589F}" vid="{4A3C46E8-61CC-4603-A589-7422A47A8E4A}"/>
     </a:ext>
   </a:extLst>
 </a:theme>
